--- a/Modul Minna 1/Bab 15/40. Minna 1 Tata Bahasa Bab 15 - Slide.pptx
+++ b/Modul Minna 1/Bab 15/40. Minna 1 Tata Bahasa Bab 15 - Slide.pptx
@@ -3326,7 +3326,7 @@
                 <a:ea typeface="Arial" pitchFamily="34" charset="-122"/>
                 <a:cs typeface="Arial" pitchFamily="34" charset="-120"/>
               </a:rPr>
-              <a:t>わたしはおおさかにすんでいます。</a:t>
+              <a:t>わたしはスラバヤにすんでいます。</a:t>
             </a:r>
             <a:endParaRPr lang="en-US" sz="1700" dirty="0"/>
           </a:p>
@@ -3365,7 +3365,7 @@
                 <a:ea typeface="Arial" pitchFamily="34" charset="-122"/>
                 <a:cs typeface="Arial" pitchFamily="34" charset="-120"/>
               </a:rPr>
-              <a:t>watashi wa Oosaka ni sunde imasu</a:t>
+              <a:t>watashi wa Surabaya ni sunde imasu</a:t>
             </a:r>
             <a:pPr indent="0" marL="0">
               <a:buNone/>
@@ -3393,7 +3393,7 @@
                 <a:ea typeface="Arial" pitchFamily="34" charset="-122"/>
                 <a:cs typeface="Arial" pitchFamily="34" charset="-120"/>
               </a:rPr>
-              <a:t>Saya tinggal di Osaka.</a:t>
+              <a:t>Saya tinggal di Surabaya.</a:t>
             </a:r>
             <a:endParaRPr lang="en-US" sz="950" dirty="0"/>
           </a:p>
